--- a/10-Knowledge-Products/KP1-GEA/videos/module_2/en/decks/KP1_M2_Deck_v0.2.pptx
+++ b/10-Knowledge-Products/KP1-GEA/videos/module_2/en/decks/KP1_M2_Deck_v0.2.pptx
@@ -16575,7 +16575,7 @@
                 </a:solidFill>
                 <a:latin typeface="Arial"/>
               </a:rPr>
-              <a:t>~5 minutes · standalone video · voice-over on text slides</a:t>
+              <a:t>standalone video · voice-over on text slides</a:t>
             </a:r>
           </a:p>
         </p:txBody>
@@ -20729,7 +20729,7 @@
                 </a:solidFill>
                 <a:latin typeface="Arial"/>
               </a:rPr>
-              <a:t>~4 minutes · standalone video · voice-over on text slides</a:t>
+              <a:t>standalone video · voice-over on text slides</a:t>
             </a:r>
           </a:p>
         </p:txBody>
@@ -24514,7 +24514,7 @@
                 </a:solidFill>
                 <a:latin typeface="Arial"/>
               </a:rPr>
-              <a:t>~4 minutes · standalone video · voice-over on text slides</a:t>
+              <a:t>standalone video · voice-over on text slides</a:t>
             </a:r>
           </a:p>
         </p:txBody>
@@ -24912,7 +24912,7 @@
                 </a:solidFill>
                 <a:latin typeface="Arial"/>
               </a:rPr>
-              <a:t>~5 minutes · standalone video · voice-over on text slides</a:t>
+              <a:t>standalone video · voice-over on text slides</a:t>
             </a:r>
           </a:p>
         </p:txBody>
@@ -27109,7 +27109,7 @@
                 </a:solidFill>
                 <a:latin typeface="Arial"/>
               </a:rPr>
-              <a:t>~5 minutes · standalone video · voice-over on text slides</a:t>
+              <a:t>standalone video · voice-over on text slides</a:t>
             </a:r>
           </a:p>
         </p:txBody>
@@ -30987,7 +30987,7 @@
                 </a:solidFill>
                 <a:latin typeface="Arial"/>
               </a:rPr>
-              <a:t>~5 minutes · standalone video · voice-over on text slides</a:t>
+              <a:t>standalone video · voice-over on text slides</a:t>
             </a:r>
           </a:p>
         </p:txBody>
@@ -34910,7 +34910,7 @@
                 </a:solidFill>
                 <a:latin typeface="Arial"/>
               </a:rPr>
-              <a:t>~4 minutes · standalone video · voice-over on text slides</a:t>
+              <a:t>standalone video · voice-over on text slides</a:t>
             </a:r>
           </a:p>
         </p:txBody>

--- a/10-Knowledge-Products/KP1-GEA/videos/module_2/en/decks/KP1_M2_Deck_v0.2.pptx
+++ b/10-Knowledge-Products/KP1-GEA/videos/module_2/en/decks/KP1_M2_Deck_v0.2.pptx
@@ -16439,7 +16439,7 @@
                 </a:solidFill>
                 <a:latin typeface="Arial"/>
               </a:rPr>
-              <a:t>KP1 · MODULE 2 · VIDEO 2.2</a:t>
+              <a:t>MODULE 2 · VIDEO 2.2</a:t>
             </a:r>
           </a:p>
         </p:txBody>
@@ -20593,7 +20593,7 @@
                 </a:solidFill>
                 <a:latin typeface="Arial"/>
               </a:rPr>
-              <a:t>KP1 · MODULE 2 · VIDEO 2.3</a:t>
+              <a:t>MODULE 2 · VIDEO 2.3</a:t>
             </a:r>
           </a:p>
         </p:txBody>
@@ -24378,7 +24378,7 @@
                 </a:solidFill>
                 <a:latin typeface="Arial"/>
               </a:rPr>
-              <a:t>KP1 · MODULE 2 · VIDEO 2.4</a:t>
+              <a:t>MODULE 2 · VIDEO 2.4</a:t>
             </a:r>
           </a:p>
         </p:txBody>
@@ -24776,7 +24776,7 @@
                 </a:solidFill>
                 <a:latin typeface="Arial"/>
               </a:rPr>
-              <a:t>KP1 · MODULE 2 · VIDEO 2.1</a:t>
+              <a:t>MODULE 2 · VIDEO 2.1</a:t>
             </a:r>
           </a:p>
         </p:txBody>
@@ -26973,7 +26973,7 @@
                 </a:solidFill>
                 <a:latin typeface="Arial"/>
               </a:rPr>
-              <a:t>KP1 · MODULE 2 · VIDEO 2.5</a:t>
+              <a:t>MODULE 2 · VIDEO 2.5</a:t>
             </a:r>
           </a:p>
         </p:txBody>
@@ -30851,7 +30851,7 @@
                 </a:solidFill>
                 <a:latin typeface="Arial"/>
               </a:rPr>
-              <a:t>KP1 · MODULE 2 · VIDEO 2.6</a:t>
+              <a:t>MODULE 2 · VIDEO 2.6</a:t>
             </a:r>
           </a:p>
         </p:txBody>
@@ -34774,7 +34774,7 @@
                 </a:solidFill>
                 <a:latin typeface="Arial"/>
               </a:rPr>
-              <a:t>KP1 · MODULE 2 · VIDEO 2.7</a:t>
+              <a:t>MODULE 2 · VIDEO 2.7</a:t>
             </a:r>
           </a:p>
         </p:txBody>
